--- a/presentations/01-why-a-game/01-why-a-game-lab.pptx
+++ b/presentations/01-why-a-game/01-why-a-game-lab.pptx
@@ -136,7 +136,7 @@
   <p:extLst>
     <p:ext uri="{521415D9-36F7-43E2-AB2F-B90AF26B5E84}">
       <p14:sectionLst xmlns:p14="http://schemas.microsoft.com/office/powerpoint/2010/main">
-        <p14:section name="Opening" id="{7c78db4f-7ff1-bca0-03db-085d8e2370c1}">
+        <p14:section name="Opening" id="{11000617-42d5-92ab-943c-0ea4d36c83e7}">
           <p14:sldIdLst>
             <p14:sldId id="256"/>
             <p14:sldId id="257"/>
@@ -144,7 +144,7 @@
             <p14:sldId id="259"/>
           </p14:sldIdLst>
         </p14:section>
-        <p14:section name="Play" id="{7702dc21-c7e8-a264-07d0-87a7a308e525}">
+        <p14:section name="Play" id="{27943291-9163-c5de-f9c8-bb6c0cc518b6}">
           <p14:sldIdLst>
             <p14:sldId id="260"/>
             <p14:sldId id="261"/>
@@ -154,7 +154,7 @@
             <p14:sldId id="265"/>
           </p14:sldIdLst>
         </p14:section>
-        <p14:section name="Observe" id="{0631ccd6-f38f-7095-3d9c-9959f4478be6}">
+        <p14:section name="Observe" id="{cdfd0de3-a7bc-9fce-0cba-22f3f6d6d7d0}">
           <p14:sldIdLst>
             <p14:sldId id="266"/>
             <p14:sldId id="267"/>
@@ -164,7 +164,7 @@
             <p14:sldId id="271"/>
           </p14:sldIdLst>
         </p14:section>
-        <p14:section name="Explore" id="{0cb319fc-7a35-e434-fa9d-601a175f32d3}">
+        <p14:section name="Explore" id="{96d267f5-defc-0ce9-cd0c-c3287e5fe7dd}">
           <p14:sldIdLst>
             <p14:sldId id="272"/>
             <p14:sldId id="273"/>
@@ -172,7 +172,7 @@
             <p14:sldId id="275"/>
           </p14:sldIdLst>
         </p14:section>
-        <p14:section name="Read" id="{f53ad6bb-6bb6-e10e-7ff4-cc135b68bd6b}">
+        <p14:section name="Read" id="{b441bc87-d1ef-c3c1-6cec-ac2e982b1904}">
           <p14:sldIdLst>
             <p14:sldId id="276"/>
             <p14:sldId id="277"/>
@@ -181,7 +181,7 @@
             <p14:sldId id="280"/>
           </p14:sldIdLst>
         </p14:section>
-        <p14:section name="Reflect" id="{22434185-d123-fc18-0cdd-e1471993b680}">
+        <p14:section name="Reflect" id="{0665d0c0-9a06-a2b2-c076-ae74318afddc}">
           <p14:sldIdLst>
             <p14:sldId id="281"/>
             <p14:sldId id="282"/>
@@ -189,7 +189,7 @@
             <p14:sldId id="284"/>
           </p14:sldIdLst>
         </p14:section>
-        <p14:section name="Closing" id="{6dabca78-d8d2-781a-559e-766d168f9fd2}">
+        <p14:section name="Closing" id="{0b39faab-98cf-eb40-4d20-de0c6472dd74}">
           <p14:sldIdLst>
             <p14:sldId id="285"/>
           </p14:sldIdLst>
@@ -1038,7 +1038,8 @@
           <a:p>
             <a:r>
               <a:rPr lang="en-US" dirty="0"/>
-              <a:t>Do not explain registers yet; the aim is to see that a game is a sequence of small steps.</a:t>
+              <a:t>Do not explain registers yet; the aim is to see that a game is a sequence of small steps.
+</a:t>
             </a:r>
             <a:endParaRPr lang="en-US" dirty="0"/>
           </a:p>
@@ -5494,12 +5495,12 @@
         </p:nvSpPr>
         <p:spPr>
           <a:xfrm>
-            <a:off x="8092440" y="2834640"/>
-            <a:ext cx="3550615" cy="3383280"/>
+            <a:off x="8092440" y="2788920"/>
+            <a:ext cx="3550615" cy="3429000"/>
           </a:xfrm>
           <a:prstGeom prst="roundRect">
             <a:avLst>
-              <a:gd name="adj" fmla="val 2162"/>
+              <a:gd name="adj" fmla="val 2133"/>
             </a:avLst>
           </a:prstGeom>
           <a:solidFill>
@@ -5521,8 +5522,8 @@
         </p:nvSpPr>
         <p:spPr>
           <a:xfrm>
-            <a:off x="8321040" y="2971800"/>
-            <a:ext cx="3093415" cy="365760"/>
+            <a:off x="8321040" y="2880360"/>
+            <a:ext cx="3093415" cy="310896"/>
           </a:xfrm>
           <a:prstGeom prst="rect">
             <a:avLst/>
@@ -5538,7 +5539,7 @@
               <a:buNone/>
             </a:pPr>
             <a:r>
-              <a:rPr lang="en-US" sz="1500" b="1" dirty="0">
+              <a:rPr lang="en-US" sz="1400" b="1" dirty="0">
                 <a:solidFill>
                   <a:srgbClr val="2F7D4F"/>
                 </a:solidFill>
@@ -5548,7 +5549,7 @@
               </a:rPr>
               <a:t>Expected result</a:t>
             </a:r>
-            <a:endParaRPr lang="en-US" sz="1500" dirty="0"/>
+            <a:endParaRPr lang="en-US" sz="1400" dirty="0"/>
           </a:p>
         </p:txBody>
       </p:sp>
@@ -5560,8 +5561,8 @@
         </p:nvSpPr>
         <p:spPr>
           <a:xfrm>
-            <a:off x="8321040" y="3429000"/>
-            <a:ext cx="3093415" cy="2606040"/>
+            <a:off x="8321040" y="3246120"/>
+            <a:ext cx="3093415" cy="2862072"/>
           </a:xfrm>
           <a:prstGeom prst="rect">
             <a:avLst/>
@@ -6837,12 +6838,12 @@
         </p:nvSpPr>
         <p:spPr>
           <a:xfrm>
-            <a:off x="8092440" y="2834640"/>
-            <a:ext cx="3550615" cy="3383280"/>
+            <a:off x="8092440" y="2788920"/>
+            <a:ext cx="3550615" cy="3429000"/>
           </a:xfrm>
           <a:prstGeom prst="roundRect">
             <a:avLst>
-              <a:gd name="adj" fmla="val 2162"/>
+              <a:gd name="adj" fmla="val 2133"/>
             </a:avLst>
           </a:prstGeom>
           <a:solidFill>
@@ -6864,8 +6865,8 @@
         </p:nvSpPr>
         <p:spPr>
           <a:xfrm>
-            <a:off x="8321040" y="2971800"/>
-            <a:ext cx="3093415" cy="365760"/>
+            <a:off x="8321040" y="2880360"/>
+            <a:ext cx="3093415" cy="310896"/>
           </a:xfrm>
           <a:prstGeom prst="rect">
             <a:avLst/>
@@ -6881,7 +6882,7 @@
               <a:buNone/>
             </a:pPr>
             <a:r>
-              <a:rPr lang="en-US" sz="1500" b="1" dirty="0">
+              <a:rPr lang="en-US" sz="1400" b="1" dirty="0">
                 <a:solidFill>
                   <a:srgbClr val="2F7D4F"/>
                 </a:solidFill>
@@ -6891,7 +6892,7 @@
               </a:rPr>
               <a:t>Expected result</a:t>
             </a:r>
-            <a:endParaRPr lang="en-US" sz="1500" dirty="0"/>
+            <a:endParaRPr lang="en-US" sz="1400" dirty="0"/>
           </a:p>
         </p:txBody>
       </p:sp>
@@ -6903,8 +6904,8 @@
         </p:nvSpPr>
         <p:spPr>
           <a:xfrm>
-            <a:off x="8321040" y="3429000"/>
-            <a:ext cx="3093415" cy="2606040"/>
+            <a:off x="8321040" y="3246120"/>
+            <a:ext cx="3093415" cy="2862072"/>
           </a:xfrm>
           <a:prstGeom prst="rect">
             <a:avLst/>
@@ -8477,12 +8478,12 @@
         </p:nvSpPr>
         <p:spPr>
           <a:xfrm>
-            <a:off x="8092440" y="2834640"/>
-            <a:ext cx="3550615" cy="3383280"/>
+            <a:off x="8092440" y="2788920"/>
+            <a:ext cx="3550615" cy="3429000"/>
           </a:xfrm>
           <a:prstGeom prst="roundRect">
             <a:avLst>
-              <a:gd name="adj" fmla="val 2162"/>
+              <a:gd name="adj" fmla="val 2133"/>
             </a:avLst>
           </a:prstGeom>
           <a:solidFill>
@@ -8504,8 +8505,8 @@
         </p:nvSpPr>
         <p:spPr>
           <a:xfrm>
-            <a:off x="8321040" y="2971800"/>
-            <a:ext cx="3093415" cy="365760"/>
+            <a:off x="8321040" y="2880360"/>
+            <a:ext cx="3093415" cy="310896"/>
           </a:xfrm>
           <a:prstGeom prst="rect">
             <a:avLst/>
@@ -8521,7 +8522,7 @@
               <a:buNone/>
             </a:pPr>
             <a:r>
-              <a:rPr lang="en-US" sz="1500" b="1" dirty="0">
+              <a:rPr lang="en-US" sz="1400" b="1" dirty="0">
                 <a:solidFill>
                   <a:srgbClr val="2F7D4F"/>
                 </a:solidFill>
@@ -8531,7 +8532,7 @@
               </a:rPr>
               <a:t>Expected result</a:t>
             </a:r>
-            <a:endParaRPr lang="en-US" sz="1500" dirty="0"/>
+            <a:endParaRPr lang="en-US" sz="1400" dirty="0"/>
           </a:p>
         </p:txBody>
       </p:sp>
@@ -8543,8 +8544,8 @@
         </p:nvSpPr>
         <p:spPr>
           <a:xfrm>
-            <a:off x="8321040" y="3429000"/>
-            <a:ext cx="3093415" cy="2606040"/>
+            <a:off x="8321040" y="3246120"/>
+            <a:ext cx="3093415" cy="2862072"/>
           </a:xfrm>
           <a:prstGeom prst="rect">
             <a:avLst/>
@@ -10661,12 +10662,12 @@
         </p:nvSpPr>
         <p:spPr>
           <a:xfrm>
-            <a:off x="8092440" y="2834640"/>
-            <a:ext cx="3550615" cy="3383280"/>
+            <a:off x="8092440" y="2788920"/>
+            <a:ext cx="3550615" cy="3429000"/>
           </a:xfrm>
           <a:prstGeom prst="roundRect">
             <a:avLst>
-              <a:gd name="adj" fmla="val 2162"/>
+              <a:gd name="adj" fmla="val 2133"/>
             </a:avLst>
           </a:prstGeom>
           <a:solidFill>
@@ -10688,8 +10689,8 @@
         </p:nvSpPr>
         <p:spPr>
           <a:xfrm>
-            <a:off x="8321040" y="2971800"/>
-            <a:ext cx="3093415" cy="365760"/>
+            <a:off x="8321040" y="2880360"/>
+            <a:ext cx="3093415" cy="310896"/>
           </a:xfrm>
           <a:prstGeom prst="rect">
             <a:avLst/>
@@ -10705,7 +10706,7 @@
               <a:buNone/>
             </a:pPr>
             <a:r>
-              <a:rPr lang="en-US" sz="1500" b="1" dirty="0">
+              <a:rPr lang="en-US" sz="1400" b="1" dirty="0">
                 <a:solidFill>
                   <a:srgbClr val="2F7D4F"/>
                 </a:solidFill>
@@ -10715,7 +10716,7 @@
               </a:rPr>
               <a:t>Expected result</a:t>
             </a:r>
-            <a:endParaRPr lang="en-US" sz="1500" dirty="0"/>
+            <a:endParaRPr lang="en-US" sz="1400" dirty="0"/>
           </a:p>
         </p:txBody>
       </p:sp>
@@ -10727,8 +10728,8 @@
         </p:nvSpPr>
         <p:spPr>
           <a:xfrm>
-            <a:off x="8321040" y="3429000"/>
-            <a:ext cx="3093415" cy="2606040"/>
+            <a:off x="8321040" y="3246120"/>
+            <a:ext cx="3093415" cy="2862072"/>
           </a:xfrm>
           <a:prstGeom prst="rect">
             <a:avLst/>
@@ -11114,7 +11115,7 @@
               <a:buNone/>
             </a:pPr>
             <a:r>
-              <a:rPr lang="en-US" sz="1800" dirty="0">
+              <a:rPr lang="en-US" sz="1700" dirty="0">
                 <a:solidFill>
                   <a:srgbClr val="E6EDF2"/>
                 </a:solidFill>
@@ -11124,14 +11125,14 @@
               </a:rPr>
               <a:t>.option norelax</a:t>
             </a:r>
-            <a:endParaRPr lang="en-US" sz="1800" dirty="0"/>
+            <a:endParaRPr lang="en-US" sz="1700" dirty="0"/>
           </a:p>
           <a:p>
             <a:pPr indent="0" marL="0">
               <a:buNone/>
             </a:pPr>
             <a:r>
-              <a:rPr lang="en-US" sz="1800" dirty="0">
+              <a:rPr lang="en-US" sz="1700" dirty="0">
                 <a:solidFill>
                   <a:srgbClr val="E6EDF2"/>
                 </a:solidFill>
@@ -11141,14 +11142,14 @@
               </a:rPr>
               <a:t>.section .text</a:t>
             </a:r>
-            <a:endParaRPr lang="en-US" sz="1800" dirty="0"/>
+            <a:endParaRPr lang="en-US" sz="1700" dirty="0"/>
           </a:p>
           <a:p>
             <a:pPr indent="0" marL="0">
               <a:buNone/>
             </a:pPr>
             <a:r>
-              <a:rPr lang="en-US" sz="1800" dirty="0">
+              <a:rPr lang="en-US" sz="1700" dirty="0">
                 <a:solidFill>
                   <a:srgbClr val="E6EDF2"/>
                 </a:solidFill>
@@ -11158,14 +11159,14 @@
               </a:rPr>
               <a:t>.global hello_init</a:t>
             </a:r>
-            <a:endParaRPr lang="en-US" sz="1800" dirty="0"/>
+            <a:endParaRPr lang="en-US" sz="1700" dirty="0"/>
           </a:p>
           <a:p>
             <a:pPr indent="0" marL="0">
               <a:buNone/>
             </a:pPr>
             <a:r>
-              <a:rPr lang="en-US" sz="1800" dirty="0">
+              <a:rPr lang="en-US" sz="1700" dirty="0">
                 <a:solidFill>
                   <a:srgbClr val="E6EDF2"/>
                 </a:solidFill>
@@ -11175,14 +11176,14 @@
               </a:rPr>
               <a:t>.global hello_update</a:t>
             </a:r>
-            <a:endParaRPr lang="en-US" sz="1800" dirty="0"/>
+            <a:endParaRPr lang="en-US" sz="1700" dirty="0"/>
           </a:p>
           <a:p>
             <a:pPr indent="0" marL="0">
               <a:buNone/>
             </a:pPr>
             <a:r>
-              <a:rPr lang="en-US" sz="1800" dirty="0">
+              <a:rPr lang="en-US" sz="1700" dirty="0">
                 <a:solidFill>
                   <a:srgbClr val="E6EDF2"/>
                 </a:solidFill>
@@ -11192,14 +11193,14 @@
               </a:rPr>
               <a:t>.global hello_draw</a:t>
             </a:r>
-            <a:endParaRPr lang="en-US" sz="1800" dirty="0"/>
+            <a:endParaRPr lang="en-US" sz="1700" dirty="0"/>
           </a:p>
           <a:p>
             <a:pPr indent="0" marL="0">
               <a:buNone/>
             </a:pPr>
             <a:r>
-              <a:rPr lang="en-US" sz="1800" dirty="0">
+              <a:rPr lang="en-US" sz="1700" dirty="0">
                 <a:solidFill>
                   <a:srgbClr val="E6EDF2"/>
                 </a:solidFill>
@@ -11209,14 +11210,14 @@
               </a:rPr>
               <a:t> </a:t>
             </a:r>
-            <a:endParaRPr lang="en-US" sz="1800" dirty="0"/>
+            <a:endParaRPr lang="en-US" sz="1700" dirty="0"/>
           </a:p>
           <a:p>
             <a:pPr indent="0" marL="0">
               <a:buNone/>
             </a:pPr>
             <a:r>
-              <a:rPr lang="en-US" sz="1800" dirty="0">
+              <a:rPr lang="en-US" sz="1700" dirty="0">
                 <a:solidFill>
                   <a:srgbClr val="E6EDF2"/>
                 </a:solidFill>
@@ -11226,14 +11227,14 @@
               </a:rPr>
               <a:t>hello_init:</a:t>
             </a:r>
-            <a:endParaRPr lang="en-US" sz="1800" dirty="0"/>
+            <a:endParaRPr lang="en-US" sz="1700" dirty="0"/>
           </a:p>
           <a:p>
             <a:pPr indent="0" marL="0">
               <a:buNone/>
             </a:pPr>
             <a:r>
-              <a:rPr lang="en-US" sz="1800" dirty="0">
+              <a:rPr lang="en-US" sz="1700" dirty="0">
                 <a:solidFill>
                   <a:srgbClr val="E6EDF2"/>
                 </a:solidFill>
@@ -11247,7 +11248,7 @@
               <a:buNone/>
             </a:pPr>
             <a:r>
-              <a:rPr lang="en-US" sz="1800" dirty="0">
+              <a:rPr lang="en-US" sz="1700" dirty="0">
                 <a:solidFill>
                   <a:srgbClr val="8FB3A0"/>
                 </a:solidFill>
@@ -11257,14 +11258,14 @@
               </a:rPr>
               <a:t># return to the framework</a:t>
             </a:r>
-            <a:endParaRPr lang="en-US" sz="1800" dirty="0"/>
+            <a:endParaRPr lang="en-US" sz="1700" dirty="0"/>
           </a:p>
           <a:p>
             <a:pPr indent="0" marL="0">
               <a:buNone/>
             </a:pPr>
             <a:r>
-              <a:rPr lang="en-US" sz="1800" dirty="0">
+              <a:rPr lang="en-US" sz="1700" dirty="0">
                 <a:solidFill>
                   <a:srgbClr val="E6EDF2"/>
                 </a:solidFill>
@@ -11274,14 +11275,14 @@
               </a:rPr>
               <a:t> </a:t>
             </a:r>
-            <a:endParaRPr lang="en-US" sz="1800" dirty="0"/>
+            <a:endParaRPr lang="en-US" sz="1700" dirty="0"/>
           </a:p>
           <a:p>
             <a:pPr indent="0" marL="0">
               <a:buNone/>
             </a:pPr>
             <a:r>
-              <a:rPr lang="en-US" sz="1800" dirty="0">
+              <a:rPr lang="en-US" sz="1700" dirty="0">
                 <a:solidFill>
                   <a:srgbClr val="E6EDF2"/>
                 </a:solidFill>
@@ -11291,14 +11292,14 @@
               </a:rPr>
               <a:t>hello_update:</a:t>
             </a:r>
-            <a:endParaRPr lang="en-US" sz="1800" dirty="0"/>
+            <a:endParaRPr lang="en-US" sz="1700" dirty="0"/>
           </a:p>
           <a:p>
             <a:pPr indent="0" marL="0">
               <a:buNone/>
             </a:pPr>
             <a:r>
-              <a:rPr lang="en-US" sz="1800" dirty="0">
+              <a:rPr lang="en-US" sz="1700" dirty="0">
                 <a:solidFill>
                   <a:srgbClr val="E6EDF2"/>
                 </a:solidFill>
@@ -11308,14 +11309,14 @@
               </a:rPr>
               <a:t>    ret</a:t>
             </a:r>
-            <a:endParaRPr lang="en-US" sz="1800" dirty="0"/>
+            <a:endParaRPr lang="en-US" sz="1700" dirty="0"/>
           </a:p>
           <a:p>
             <a:pPr indent="0" marL="0">
               <a:buNone/>
             </a:pPr>
             <a:r>
-              <a:rPr lang="en-US" sz="1800" dirty="0">
+              <a:rPr lang="en-US" sz="1700" dirty="0">
                 <a:solidFill>
                   <a:srgbClr val="E6EDF2"/>
                 </a:solidFill>
@@ -11325,14 +11326,14 @@
               </a:rPr>
               <a:t> </a:t>
             </a:r>
-            <a:endParaRPr lang="en-US" sz="1800" dirty="0"/>
+            <a:endParaRPr lang="en-US" sz="1700" dirty="0"/>
           </a:p>
           <a:p>
             <a:pPr indent="0" marL="0">
               <a:buNone/>
             </a:pPr>
             <a:r>
-              <a:rPr lang="en-US" sz="1800" dirty="0">
+              <a:rPr lang="en-US" sz="1700" dirty="0">
                 <a:solidFill>
                   <a:srgbClr val="E6EDF2"/>
                 </a:solidFill>
@@ -11342,14 +11343,14 @@
               </a:rPr>
               <a:t>hello_draw:</a:t>
             </a:r>
-            <a:endParaRPr lang="en-US" sz="1800" dirty="0"/>
+            <a:endParaRPr lang="en-US" sz="1700" dirty="0"/>
           </a:p>
           <a:p>
             <a:pPr indent="0" marL="0">
               <a:buNone/>
             </a:pPr>
             <a:r>
-              <a:rPr lang="en-US" sz="1800" dirty="0">
+              <a:rPr lang="en-US" sz="1700" dirty="0">
                 <a:solidFill>
                   <a:srgbClr val="E6EDF2"/>
                 </a:solidFill>
@@ -11359,7 +11360,7 @@
               </a:rPr>
               <a:t>    ret</a:t>
             </a:r>
-            <a:endParaRPr lang="en-US" sz="1800" dirty="0"/>
+            <a:endParaRPr lang="en-US" sz="1700" dirty="0"/>
           </a:p>
         </p:txBody>
       </p:sp>
@@ -12273,12 +12274,12 @@
         </p:nvSpPr>
         <p:spPr>
           <a:xfrm>
-            <a:off x="8092440" y="2834640"/>
-            <a:ext cx="3550615" cy="3383280"/>
+            <a:off x="8092440" y="2788920"/>
+            <a:ext cx="3550615" cy="3429000"/>
           </a:xfrm>
           <a:prstGeom prst="roundRect">
             <a:avLst>
-              <a:gd name="adj" fmla="val 2162"/>
+              <a:gd name="adj" fmla="val 2133"/>
             </a:avLst>
           </a:prstGeom>
           <a:solidFill>
@@ -12300,8 +12301,8 @@
         </p:nvSpPr>
         <p:spPr>
           <a:xfrm>
-            <a:off x="8321040" y="2971800"/>
-            <a:ext cx="3093415" cy="365760"/>
+            <a:off x="8321040" y="2880360"/>
+            <a:ext cx="3093415" cy="310896"/>
           </a:xfrm>
           <a:prstGeom prst="rect">
             <a:avLst/>
@@ -12317,7 +12318,7 @@
               <a:buNone/>
             </a:pPr>
             <a:r>
-              <a:rPr lang="en-US" sz="1500" b="1" dirty="0">
+              <a:rPr lang="en-US" sz="1400" b="1" dirty="0">
                 <a:solidFill>
                   <a:srgbClr val="2F7D4F"/>
                 </a:solidFill>
@@ -12327,7 +12328,7 @@
               </a:rPr>
               <a:t>Expected result</a:t>
             </a:r>
-            <a:endParaRPr lang="en-US" sz="1500" dirty="0"/>
+            <a:endParaRPr lang="en-US" sz="1400" dirty="0"/>
           </a:p>
         </p:txBody>
       </p:sp>
@@ -12339,8 +12340,8 @@
         </p:nvSpPr>
         <p:spPr>
           <a:xfrm>
-            <a:off x="8321040" y="3429000"/>
-            <a:ext cx="3093415" cy="2606040"/>
+            <a:off x="8321040" y="3246120"/>
+            <a:ext cx="3093415" cy="2862072"/>
           </a:xfrm>
           <a:prstGeom prst="rect">
             <a:avLst/>
@@ -13862,12 +13863,12 @@
         </p:nvSpPr>
         <p:spPr>
           <a:xfrm>
-            <a:off x="8092440" y="2834640"/>
-            <a:ext cx="3550615" cy="3383280"/>
+            <a:off x="8092440" y="2788920"/>
+            <a:ext cx="3550615" cy="3429000"/>
           </a:xfrm>
           <a:prstGeom prst="roundRect">
             <a:avLst>
-              <a:gd name="adj" fmla="val 2162"/>
+              <a:gd name="adj" fmla="val 2133"/>
             </a:avLst>
           </a:prstGeom>
           <a:solidFill>
@@ -13889,8 +13890,8 @@
         </p:nvSpPr>
         <p:spPr>
           <a:xfrm>
-            <a:off x="8321040" y="2971800"/>
-            <a:ext cx="3093415" cy="365760"/>
+            <a:off x="8321040" y="2880360"/>
+            <a:ext cx="3093415" cy="310896"/>
           </a:xfrm>
           <a:prstGeom prst="rect">
             <a:avLst/>
@@ -13906,7 +13907,7 @@
               <a:buNone/>
             </a:pPr>
             <a:r>
-              <a:rPr lang="en-US" sz="1500" b="1" dirty="0">
+              <a:rPr lang="en-US" sz="1400" b="1" dirty="0">
                 <a:solidFill>
                   <a:srgbClr val="2F7D4F"/>
                 </a:solidFill>
@@ -13916,7 +13917,7 @@
               </a:rPr>
               <a:t>Expected result</a:t>
             </a:r>
-            <a:endParaRPr lang="en-US" sz="1500" dirty="0"/>
+            <a:endParaRPr lang="en-US" sz="1400" dirty="0"/>
           </a:p>
         </p:txBody>
       </p:sp>
@@ -13928,8 +13929,8 @@
         </p:nvSpPr>
         <p:spPr>
           <a:xfrm>
-            <a:off x="8321040" y="3429000"/>
-            <a:ext cx="3093415" cy="2606040"/>
+            <a:off x="8321040" y="3246120"/>
+            <a:ext cx="3093415" cy="2862072"/>
           </a:xfrm>
           <a:prstGeom prst="rect">
             <a:avLst/>
@@ -15092,12 +15093,12 @@
         </p:nvSpPr>
         <p:spPr>
           <a:xfrm>
-            <a:off x="8092440" y="2834640"/>
-            <a:ext cx="3550615" cy="3383280"/>
+            <a:off x="8092440" y="2788920"/>
+            <a:ext cx="3550615" cy="3429000"/>
           </a:xfrm>
           <a:prstGeom prst="roundRect">
             <a:avLst>
-              <a:gd name="adj" fmla="val 2162"/>
+              <a:gd name="adj" fmla="val 2133"/>
             </a:avLst>
           </a:prstGeom>
           <a:solidFill>
@@ -15119,8 +15120,8 @@
         </p:nvSpPr>
         <p:spPr>
           <a:xfrm>
-            <a:off x="8321040" y="2971800"/>
-            <a:ext cx="3093415" cy="365760"/>
+            <a:off x="8321040" y="2880360"/>
+            <a:ext cx="3093415" cy="310896"/>
           </a:xfrm>
           <a:prstGeom prst="rect">
             <a:avLst/>
@@ -15136,7 +15137,7 @@
               <a:buNone/>
             </a:pPr>
             <a:r>
-              <a:rPr lang="en-US" sz="1500" b="1" dirty="0">
+              <a:rPr lang="en-US" sz="1400" b="1" dirty="0">
                 <a:solidFill>
                   <a:srgbClr val="2F7D4F"/>
                 </a:solidFill>
@@ -15146,7 +15147,7 @@
               </a:rPr>
               <a:t>Expected result</a:t>
             </a:r>
-            <a:endParaRPr lang="en-US" sz="1500" dirty="0"/>
+            <a:endParaRPr lang="en-US" sz="1400" dirty="0"/>
           </a:p>
         </p:txBody>
       </p:sp>
@@ -15158,8 +15159,8 @@
         </p:nvSpPr>
         <p:spPr>
           <a:xfrm>
-            <a:off x="8321040" y="3429000"/>
-            <a:ext cx="3093415" cy="2606040"/>
+            <a:off x="8321040" y="3246120"/>
+            <a:ext cx="3093415" cy="2862072"/>
           </a:xfrm>
           <a:prstGeom prst="rect">
             <a:avLst/>
@@ -18297,12 +18298,12 @@
         </p:nvSpPr>
         <p:spPr>
           <a:xfrm>
-            <a:off x="8092440" y="2834640"/>
-            <a:ext cx="3550615" cy="3383280"/>
+            <a:off x="8092440" y="2788920"/>
+            <a:ext cx="3550615" cy="3429000"/>
           </a:xfrm>
           <a:prstGeom prst="roundRect">
             <a:avLst>
-              <a:gd name="adj" fmla="val 2162"/>
+              <a:gd name="adj" fmla="val 2133"/>
             </a:avLst>
           </a:prstGeom>
           <a:solidFill>
@@ -18324,8 +18325,8 @@
         </p:nvSpPr>
         <p:spPr>
           <a:xfrm>
-            <a:off x="8321040" y="2971800"/>
-            <a:ext cx="3093415" cy="365760"/>
+            <a:off x="8321040" y="2880360"/>
+            <a:ext cx="3093415" cy="310896"/>
           </a:xfrm>
           <a:prstGeom prst="rect">
             <a:avLst/>
@@ -18341,7 +18342,7 @@
               <a:buNone/>
             </a:pPr>
             <a:r>
-              <a:rPr lang="en-US" sz="1500" b="1" dirty="0">
+              <a:rPr lang="en-US" sz="1400" b="1" dirty="0">
                 <a:solidFill>
                   <a:srgbClr val="2F7D4F"/>
                 </a:solidFill>
@@ -18351,7 +18352,7 @@
               </a:rPr>
               <a:t>Expected result</a:t>
             </a:r>
-            <a:endParaRPr lang="en-US" sz="1500" dirty="0"/>
+            <a:endParaRPr lang="en-US" sz="1400" dirty="0"/>
           </a:p>
         </p:txBody>
       </p:sp>
@@ -18363,8 +18364,8 @@
         </p:nvSpPr>
         <p:spPr>
           <a:xfrm>
-            <a:off x="8321040" y="3429000"/>
-            <a:ext cx="3093415" cy="2606040"/>
+            <a:off x="8321040" y="3246120"/>
+            <a:ext cx="3093415" cy="2862072"/>
           </a:xfrm>
           <a:prstGeom prst="rect">
             <a:avLst/>
@@ -19142,12 +19143,12 @@
         </p:nvSpPr>
         <p:spPr>
           <a:xfrm>
-            <a:off x="8092440" y="2834640"/>
-            <a:ext cx="3550615" cy="3383280"/>
+            <a:off x="8092440" y="2788920"/>
+            <a:ext cx="3550615" cy="3429000"/>
           </a:xfrm>
           <a:prstGeom prst="roundRect">
             <a:avLst>
-              <a:gd name="adj" fmla="val 2162"/>
+              <a:gd name="adj" fmla="val 2133"/>
             </a:avLst>
           </a:prstGeom>
           <a:solidFill>
@@ -19169,8 +19170,8 @@
         </p:nvSpPr>
         <p:spPr>
           <a:xfrm>
-            <a:off x="8321040" y="2971800"/>
-            <a:ext cx="3093415" cy="365760"/>
+            <a:off x="8321040" y="2880360"/>
+            <a:ext cx="3093415" cy="310896"/>
           </a:xfrm>
           <a:prstGeom prst="rect">
             <a:avLst/>
@@ -19186,7 +19187,7 @@
               <a:buNone/>
             </a:pPr>
             <a:r>
-              <a:rPr lang="en-US" sz="1500" b="1" dirty="0">
+              <a:rPr lang="en-US" sz="1400" b="1" dirty="0">
                 <a:solidFill>
                   <a:srgbClr val="2F7D4F"/>
                 </a:solidFill>
@@ -19196,7 +19197,7 @@
               </a:rPr>
               <a:t>Expected result</a:t>
             </a:r>
-            <a:endParaRPr lang="en-US" sz="1500" dirty="0"/>
+            <a:endParaRPr lang="en-US" sz="1400" dirty="0"/>
           </a:p>
         </p:txBody>
       </p:sp>
@@ -19208,8 +19209,8 @@
         </p:nvSpPr>
         <p:spPr>
           <a:xfrm>
-            <a:off x="8321040" y="3429000"/>
-            <a:ext cx="3093415" cy="2606040"/>
+            <a:off x="8321040" y="3246120"/>
+            <a:ext cx="3093415" cy="2862072"/>
           </a:xfrm>
           <a:prstGeom prst="rect">
             <a:avLst/>

--- a/presentations/01-why-a-game/01-why-a-game-lab.pptx
+++ b/presentations/01-why-a-game/01-why-a-game-lab.pptx
@@ -136,7 +136,7 @@
   <p:extLst>
     <p:ext uri="{521415D9-36F7-43E2-AB2F-B90AF26B5E84}">
       <p14:sectionLst xmlns:p14="http://schemas.microsoft.com/office/powerpoint/2010/main">
-        <p14:section name="Opening" id="{11000617-42d5-92ab-943c-0ea4d36c83e7}">
+        <p14:section name="Opening" id="{5d077020-b9a3-e204-9812-219fb92a9805}">
           <p14:sldIdLst>
             <p14:sldId id="256"/>
             <p14:sldId id="257"/>
@@ -144,7 +144,7 @@
             <p14:sldId id="259"/>
           </p14:sldIdLst>
         </p14:section>
-        <p14:section name="Play" id="{27943291-9163-c5de-f9c8-bb6c0cc518b6}">
+        <p14:section name="Play" id="{3276db4a-2c2d-5b91-efda-1a61327d384c}">
           <p14:sldIdLst>
             <p14:sldId id="260"/>
             <p14:sldId id="261"/>
@@ -154,7 +154,7 @@
             <p14:sldId id="265"/>
           </p14:sldIdLst>
         </p14:section>
-        <p14:section name="Observe" id="{cdfd0de3-a7bc-9fce-0cba-22f3f6d6d7d0}">
+        <p14:section name="Observe" id="{45cf1e36-9a9d-784e-2cef-8747a8f29ba0}">
           <p14:sldIdLst>
             <p14:sldId id="266"/>
             <p14:sldId id="267"/>
@@ -164,7 +164,7 @@
             <p14:sldId id="271"/>
           </p14:sldIdLst>
         </p14:section>
-        <p14:section name="Explore" id="{96d267f5-defc-0ce9-cd0c-c3287e5fe7dd}">
+        <p14:section name="Explore" id="{52531207-52c1-73d4-4e1a-18087f76140f}">
           <p14:sldIdLst>
             <p14:sldId id="272"/>
             <p14:sldId id="273"/>
@@ -172,7 +172,7 @@
             <p14:sldId id="275"/>
           </p14:sldIdLst>
         </p14:section>
-        <p14:section name="Read" id="{b441bc87-d1ef-c3c1-6cec-ac2e982b1904}">
+        <p14:section name="Read" id="{7eff085a-8f91-d736-b24b-7e4c6b13b10d}">
           <p14:sldIdLst>
             <p14:sldId id="276"/>
             <p14:sldId id="277"/>
@@ -181,7 +181,7 @@
             <p14:sldId id="280"/>
           </p14:sldIdLst>
         </p14:section>
-        <p14:section name="Reflect" id="{0665d0c0-9a06-a2b2-c076-ae74318afddc}">
+        <p14:section name="Reflect" id="{ca96fc4f-67a0-e8f2-c6cf-949f88da199a}">
           <p14:sldIdLst>
             <p14:sldId id="281"/>
             <p14:sldId id="282"/>
@@ -189,7 +189,7 @@
             <p14:sldId id="284"/>
           </p14:sldIdLst>
         </p14:section>
-        <p14:section name="Closing" id="{0b39faab-98cf-eb40-4d20-de0c6472dd74}">
+        <p14:section name="Closing" id="{5d6f3c74-a9fc-3b4f-52c7-986bd0716f08}">
           <p14:sldIdLst>
             <p14:sldId id="285"/>
           </p14:sldIdLst>
